--- a/북극_웹지도_사용방법.pptx
+++ b/북극_웹지도_사용방법.pptx
@@ -1597,7 +1597,6 @@
         </p:nvPicPr>
         <p:blipFill>
           <a:blip r:embed="rId3"/>
-          <a:srcRect/>
           <a:stretch/>
         </p:blipFill>
         <p:spPr>
@@ -1774,7 +1773,7 @@
                 <a:ea typeface="Malgun Gothic" pitchFamily="34" charset="-122"/>
                 <a:cs typeface="Malgun Gothic" pitchFamily="34" charset="-120"/>
               </a:rPr>
-              <a:t>관측 15종(HSI·SIM·SAR·광학·IST·VIIRS) · 예측 모델 8종(KIOST 보정 포함) · 기상(GFS/WW3)</a:t>
+              <a:t>관측 22종(SIC·HSI·SAR·광학·IST·VIIRS) · 예측 모델 9종(KIOST 보정 3종 포함) · 기상(GFS/WW3)</a:t>
             </a:r>
             <a:r>
               <a:rPr lang="en-US" sz="1300" dirty="0" err="1">
@@ -1900,6 +1899,509 @@
 </file>
 
 <file path=ppt/slides/slide10.xml><?xml version="1.0" encoding="utf-8"?>
+<p:sld xmlns:a="http://schemas.openxmlformats.org/drawingml/2006/main" xmlns:r="http://schemas.openxmlformats.org/officeDocument/2006/relationships" xmlns:p="http://schemas.openxmlformats.org/presentationml/2006/main">
+  <p:cSld name="Slide 10">
+    <p:bg>
+      <p:bgPr>
+        <a:solidFill>
+          <a:srgbClr val="FFFFFF"/>
+        </a:solidFill>
+        <a:effectLst/>
+      </p:bgPr>
+    </p:bg>
+    <p:spTree>
+      <p:nvGrpSpPr>
+        <p:cNvPr id="1" name=""/>
+        <p:cNvGrpSpPr/>
+        <p:nvPr/>
+      </p:nvGrpSpPr>
+      <p:grpSpPr>
+        <a:xfrm>
+          <a:off x="0" y="0"/>
+          <a:ext cx="0" cy="0"/>
+          <a:chOff x="0" y="0"/>
+          <a:chExt cx="0" cy="0"/>
+        </a:xfrm>
+      </p:grpSpPr>
+      <p:sp>
+        <p:nvSpPr>
+          <p:cNvPr id="2" name="Text 0"/>
+          <p:cNvSpPr txBox="1"/>
+          <p:nvPr/>
+        </p:nvSpPr>
+        <p:spPr>
+          <a:xfrm>
+            <a:off x="11365992" y="6446520"/>
+            <a:ext cx="457200" cy="274320"/>
+          </a:xfrm>
+          <a:prstGeom prst="rect">
+            <a:avLst/>
+          </a:prstGeom>
+          <a:noFill/>
+          <a:ln/>
+        </p:spPr>
+        <p:txBody>
+          <a:bodyPr wrap="square" lIns="0" tIns="0" rIns="0" bIns="0" rtlCol="0" anchor="ctr"/>
+          <a:lstStyle/>
+          <a:p>
+            <a:pPr marL="0" indent="0" algn="r">
+              <a:buNone/>
+            </a:pPr>
+            <a:r>
+              <a:rPr lang="en-US" sz="1000" dirty="0">
+                <a:solidFill>
+                  <a:srgbClr val="5B6B7B"/>
+                </a:solidFill>
+                <a:latin typeface="Malgun Gothic" pitchFamily="34" charset="0"/>
+                <a:ea typeface="Malgun Gothic" pitchFamily="34" charset="-122"/>
+                <a:cs typeface="Malgun Gothic" pitchFamily="34" charset="-120"/>
+              </a:rPr>
+              <a:t>10</a:t>
+            </a:r>
+            <a:endParaRPr lang="en-US" sz="1000" dirty="0"/>
+          </a:p>
+        </p:txBody>
+      </p:sp>
+      <p:sp>
+        <p:nvSpPr>
+          <p:cNvPr id="3" name="Text 1"/>
+          <p:cNvSpPr txBox="1"/>
+          <p:nvPr/>
+        </p:nvSpPr>
+        <p:spPr>
+          <a:xfrm>
+            <a:off x="548640" y="6446520"/>
+            <a:ext cx="5486400" cy="274320"/>
+          </a:xfrm>
+          <a:prstGeom prst="rect">
+            <a:avLst/>
+          </a:prstGeom>
+          <a:noFill/>
+          <a:ln/>
+        </p:spPr>
+        <p:txBody>
+          <a:bodyPr wrap="square" lIns="0" tIns="0" rIns="0" bIns="0" rtlCol="0" anchor="ctr"/>
+          <a:lstStyle/>
+          <a:p>
+            <a:pPr marL="0" indent="0">
+              <a:buNone/>
+            </a:pPr>
+            <a:r>
+              <a:rPr lang="en-US" sz="1000" dirty="0">
+                <a:solidFill>
+                  <a:srgbClr val="5B6B7B"/>
+                </a:solidFill>
+                <a:latin typeface="Malgun Gothic" pitchFamily="34" charset="0"/>
+                <a:ea typeface="Malgun Gothic" pitchFamily="34" charset="-122"/>
+                <a:cs typeface="Malgun Gothic" pitchFamily="34" charset="-120"/>
+              </a:rPr>
+              <a:t>북극 해빙 데이터 웹 뷰어 · 사용 방법</a:t>
+            </a:r>
+            <a:endParaRPr lang="en-US" sz="1000" dirty="0"/>
+          </a:p>
+        </p:txBody>
+      </p:sp>
+      <p:sp>
+        <p:nvSpPr>
+          <p:cNvPr id="4" name="Text 2"/>
+          <p:cNvSpPr txBox="1"/>
+          <p:nvPr/>
+        </p:nvSpPr>
+        <p:spPr>
+          <a:xfrm>
+            <a:off x="548640" y="320040"/>
+            <a:ext cx="11064240" cy="685800"/>
+          </a:xfrm>
+          <a:prstGeom prst="rect">
+            <a:avLst/>
+          </a:prstGeom>
+          <a:noFill/>
+          <a:ln/>
+        </p:spPr>
+        <p:txBody>
+          <a:bodyPr wrap="square" lIns="0" tIns="0" rIns="0" bIns="0" rtlCol="0" anchor="ctr"/>
+          <a:lstStyle/>
+          <a:p>
+            <a:pPr marL="0" indent="0">
+              <a:buNone/>
+            </a:pPr>
+            <a:r>
+              <a:rPr lang="en-US" sz="3000" b="1" dirty="0">
+                <a:solidFill>
+                  <a:srgbClr val="0B2545"/>
+                </a:solidFill>
+                <a:latin typeface="Malgun Gothic" pitchFamily="34" charset="0"/>
+                <a:ea typeface="Malgun Gothic" pitchFamily="34" charset="-122"/>
+                <a:cs typeface="Malgun Gothic" pitchFamily="34" charset="-120"/>
+              </a:rPr>
+              <a:t>기상 데이터 — GFS 바람·기압, WW3 파랑</a:t>
+            </a:r>
+            <a:endParaRPr lang="en-US" sz="3000" dirty="0"/>
+          </a:p>
+        </p:txBody>
+      </p:sp>
+      <p:sp>
+        <p:nvSpPr>
+          <p:cNvPr id="5" name="Text 3"/>
+          <p:cNvSpPr txBox="1"/>
+          <p:nvPr/>
+        </p:nvSpPr>
+        <p:spPr>
+          <a:xfrm>
+            <a:off x="548640" y="960120"/>
+            <a:ext cx="11064240" cy="365760"/>
+          </a:xfrm>
+          <a:prstGeom prst="rect">
+            <a:avLst/>
+          </a:prstGeom>
+          <a:noFill/>
+          <a:ln/>
+        </p:spPr>
+        <p:txBody>
+          <a:bodyPr wrap="square" lIns="0" tIns="0" rIns="0" bIns="0" rtlCol="0" anchor="ctr"/>
+          <a:lstStyle/>
+          <a:p>
+            <a:pPr marL="0" indent="0">
+              <a:buNone/>
+            </a:pPr>
+            <a:r>
+              <a:rPr lang="en-US" sz="1400" dirty="0">
+                <a:solidFill>
+                  <a:srgbClr val="5B6B7B"/>
+                </a:solidFill>
+                <a:latin typeface="Malgun Gothic" pitchFamily="34" charset="0"/>
+                <a:ea typeface="Malgun Gothic" pitchFamily="34" charset="-122"/>
+                <a:cs typeface="Malgun Gothic" pitchFamily="34" charset="-120"/>
+              </a:rPr>
+              <a:t>기상 탭 → GFS(0.25도) · WW3(9 km) — 예보 시계열을 재생 막대로 넘겨 봅니다</a:t>
+            </a:r>
+            <a:endParaRPr lang="en-US" sz="1400" dirty="0"/>
+          </a:p>
+        </p:txBody>
+      </p:sp>
+      <p:sp>
+        <p:nvSpPr>
+          <p:cNvPr id="6" name="Shape 4"/>
+          <p:cNvSpPr/>
+          <p:nvPr/>
+        </p:nvSpPr>
+        <p:spPr>
+          <a:xfrm>
+            <a:off x="493776" y="1362456"/>
+            <a:ext cx="4681728" cy="4407408"/>
+          </a:xfrm>
+          <a:prstGeom prst="roundRect">
+            <a:avLst>
+              <a:gd name="adj" fmla="val 1660"/>
+            </a:avLst>
+          </a:prstGeom>
+          <a:solidFill>
+            <a:srgbClr val="FFFFFF"/>
+          </a:solidFill>
+          <a:ln w="9525">
+            <a:solidFill>
+              <a:srgbClr val="C9D6E3"/>
+            </a:solidFill>
+            <a:prstDash val="solid"/>
+          </a:ln>
+          <a:effectLst>
+            <a:outerShdw blurRad="76200" dist="25400" dir="5400000" algn="bl" rotWithShape="0">
+              <a:srgbClr val="000000">
+                <a:alpha val="18000"/>
+              </a:srgbClr>
+            </a:outerShdw>
+          </a:effectLst>
+        </p:spPr>
+        <p:txBody>
+          <a:bodyPr/>
+          <a:lstStyle/>
+          <a:p>
+            <a:endParaRPr lang="ko-KR" altLang="en-US"/>
+          </a:p>
+        </p:txBody>
+      </p:sp>
+      <p:pic>
+        <p:nvPicPr>
+          <p:cNvPr id="7" name="Image 0" descr="/tmp/shots/10b_swaths_map.png"/>
+          <p:cNvPicPr>
+            <a:picLocks noChangeAspect="1"/>
+          </p:cNvPicPr>
+          <p:nvPr/>
+        </p:nvPicPr>
+        <p:blipFill>
+          <a:blip r:embed="rId3"/>
+          <a:stretch>
+            <a:fillRect/>
+          </a:stretch>
+        </p:blipFill>
+        <p:spPr>
+          <a:xfrm>
+            <a:off x="548640" y="1417320"/>
+            <a:ext cx="4572000" cy="4297680"/>
+          </a:xfrm>
+          <a:prstGeom prst="rect">
+            <a:avLst/>
+          </a:prstGeom>
+        </p:spPr>
+      </p:pic>
+      <p:sp>
+        <p:nvSpPr>
+          <p:cNvPr id="8" name="Text 5"/>
+          <p:cNvSpPr txBox="1"/>
+          <p:nvPr/>
+        </p:nvSpPr>
+        <p:spPr>
+          <a:xfrm>
+            <a:off x="548640" y="5806440"/>
+            <a:ext cx="4572000" cy="274320"/>
+          </a:xfrm>
+          <a:prstGeom prst="rect">
+            <a:avLst/>
+          </a:prstGeom>
+          <a:noFill/>
+          <a:ln/>
+        </p:spPr>
+        <p:txBody>
+          <a:bodyPr wrap="square" lIns="0" tIns="0" rIns="0" bIns="0" rtlCol="0" anchor="ctr"/>
+          <a:lstStyle/>
+          <a:p>
+            <a:pPr marL="0" indent="0">
+              <a:buNone/>
+            </a:pPr>
+            <a:r>
+              <a:rPr lang="en-US" sz="1050" i="1" dirty="0">
+                <a:solidFill>
+                  <a:srgbClr val="5B6B7B"/>
+                </a:solidFill>
+                <a:latin typeface="Malgun Gothic" pitchFamily="34" charset="0"/>
+                <a:ea typeface="Malgun Gothic" pitchFamily="34" charset="-122"/>
+                <a:cs typeface="Malgun Gothic" pitchFamily="34" charset="-120"/>
+              </a:rPr>
+              <a:t>GFS 해면기압(hPa) — 기상 탭에서 담아 그린 모습 (저기압 = 푸른색)</a:t>
+            </a:r>
+            <a:endParaRPr lang="en-US" sz="1050" dirty="0"/>
+          </a:p>
+        </p:txBody>
+      </p:sp>
+      <p:sp>
+        <p:nvSpPr>
+          <p:cNvPr id="9" name="Shape 6"/>
+          <p:cNvSpPr/>
+          <p:nvPr/>
+        </p:nvSpPr>
+        <p:spPr>
+          <a:xfrm>
+            <a:off x="5294376" y="1362456"/>
+            <a:ext cx="4681728" cy="4407408"/>
+          </a:xfrm>
+          <a:prstGeom prst="roundRect">
+            <a:avLst>
+              <a:gd name="adj" fmla="val 1660"/>
+            </a:avLst>
+          </a:prstGeom>
+          <a:solidFill>
+            <a:srgbClr val="FFFFFF"/>
+          </a:solidFill>
+          <a:ln w="9525">
+            <a:solidFill>
+              <a:srgbClr val="C9D6E3"/>
+            </a:solidFill>
+            <a:prstDash val="solid"/>
+          </a:ln>
+          <a:effectLst>
+            <a:outerShdw blurRad="76200" dist="25400" dir="5400000" algn="bl" rotWithShape="0">
+              <a:srgbClr val="000000">
+                <a:alpha val="18000"/>
+              </a:srgbClr>
+            </a:outerShdw>
+          </a:effectLst>
+        </p:spPr>
+        <p:txBody>
+          <a:bodyPr/>
+          <a:lstStyle/>
+          <a:p>
+            <a:endParaRPr lang="ko-KR" altLang="en-US"/>
+          </a:p>
+        </p:txBody>
+      </p:sp>
+      <p:pic>
+        <p:nvPicPr>
+          <p:cNvPr id="10" name="Image 1" descr="/tmp/shots/11b_asip_map.png"/>
+          <p:cNvPicPr>
+            <a:picLocks noChangeAspect="1"/>
+          </p:cNvPicPr>
+          <p:nvPr/>
+        </p:nvPicPr>
+        <p:blipFill>
+          <a:blip r:embed="rId4"/>
+          <a:stretch>
+            <a:fillRect/>
+          </a:stretch>
+        </p:blipFill>
+        <p:spPr>
+          <a:xfrm>
+            <a:off x="5349240" y="1417320"/>
+            <a:ext cx="4572000" cy="4297680"/>
+          </a:xfrm>
+          <a:prstGeom prst="rect">
+            <a:avLst/>
+          </a:prstGeom>
+        </p:spPr>
+      </p:pic>
+      <p:sp>
+        <p:nvSpPr>
+          <p:cNvPr id="11" name="Text 7"/>
+          <p:cNvSpPr txBox="1"/>
+          <p:nvPr/>
+        </p:nvSpPr>
+        <p:spPr>
+          <a:xfrm>
+            <a:off x="5349240" y="5806440"/>
+            <a:ext cx="4572000" cy="274320"/>
+          </a:xfrm>
+          <a:prstGeom prst="rect">
+            <a:avLst/>
+          </a:prstGeom>
+          <a:noFill/>
+          <a:ln/>
+        </p:spPr>
+        <p:txBody>
+          <a:bodyPr wrap="square" lIns="0" tIns="0" rIns="0" bIns="0" rtlCol="0" anchor="ctr"/>
+          <a:lstStyle/>
+          <a:p>
+            <a:pPr marL="0" indent="0">
+              <a:buNone/>
+            </a:pPr>
+            <a:r>
+              <a:rPr lang="en-US" sz="1050" i="1" dirty="0">
+                <a:solidFill>
+                  <a:srgbClr val="5B6B7B"/>
+                </a:solidFill>
+                <a:latin typeface="Malgun Gothic" pitchFamily="34" charset="0"/>
+                <a:ea typeface="Malgun Gothic" pitchFamily="34" charset="-122"/>
+                <a:cs typeface="Malgun Gothic" pitchFamily="34" charset="-120"/>
+              </a:rPr>
+              <a:t>WW3 1차 너울 파고(m) — 북극 9 km 파랑 예보</a:t>
+            </a:r>
+            <a:endParaRPr lang="en-US" sz="1050" dirty="0"/>
+          </a:p>
+        </p:txBody>
+      </p:sp>
+      <p:sp>
+        <p:nvSpPr>
+          <p:cNvPr id="12" name="Text 8"/>
+          <p:cNvSpPr txBox="1"/>
+          <p:nvPr/>
+        </p:nvSpPr>
+        <p:spPr>
+          <a:xfrm>
+            <a:off x="10104120" y="1463040"/>
+            <a:ext cx="1600200" cy="4572000"/>
+          </a:xfrm>
+          <a:prstGeom prst="rect">
+            <a:avLst/>
+          </a:prstGeom>
+          <a:noFill/>
+          <a:ln/>
+        </p:spPr>
+        <p:txBody>
+          <a:bodyPr wrap="square" lIns="0" tIns="0" rIns="0" bIns="0" rtlCol="0" anchor="t"/>
+          <a:lstStyle/>
+          <a:p>
+            <a:pPr marL="342900" indent="-342900">
+              <a:spcAft>
+                <a:spcPts val="900"/>
+              </a:spcAft>
+              <a:buSzPct val="100000"/>
+              <a:buChar char="•"/>
+            </a:pPr>
+            <a:r>
+              <a:rPr lang="en-US" sz="1050" dirty="0">
+                <a:solidFill>
+                  <a:srgbClr val="13315C"/>
+                </a:solidFill>
+                <a:latin typeface="Malgun Gothic" pitchFamily="34" charset="0"/>
+                <a:ea typeface="Malgun Gothic" pitchFamily="34" charset="-122"/>
+                <a:cs typeface="Malgun Gothic" pitchFamily="34" charset="-120"/>
+              </a:rPr>
+              <a:t>GFS: 10 m 풍속·해면기압·2 m 기온. 기준일 run 의 예보 리드가 시계열 1항목으로 묶입니다.</a:t>
+            </a:r>
+            <a:endParaRPr lang="en-US" sz="1050" dirty="0"/>
+          </a:p>
+          <a:p>
+            <a:pPr marL="342900" indent="-342900">
+              <a:spcAft>
+                <a:spcPts val="900"/>
+              </a:spcAft>
+              <a:buSzPct val="100000"/>
+              <a:buChar char="•"/>
+            </a:pPr>
+            <a:r>
+              <a:rPr lang="en-US" sz="1050" dirty="0">
+                <a:solidFill>
+                  <a:srgbClr val="13315C"/>
+                </a:solidFill>
+                <a:latin typeface="Malgun Gothic" pitchFamily="34" charset="0"/>
+                <a:ea typeface="Malgun Gothic" pitchFamily="34" charset="-122"/>
+                <a:cs typeface="Malgun Gothic" pitchFamily="34" charset="-120"/>
+              </a:rPr>
+              <a:t>WW3: 1차 너울 파고·전체 유의파고·파주기 (GFS-Wave 북극 9 km 격자).</a:t>
+            </a:r>
+            <a:endParaRPr lang="en-US" sz="1050" dirty="0"/>
+          </a:p>
+          <a:p>
+            <a:pPr marL="342900" indent="-342900">
+              <a:spcAft>
+                <a:spcPts val="900"/>
+              </a:spcAft>
+              <a:buSzPct val="100000"/>
+              <a:buChar char="•"/>
+            </a:pPr>
+            <a:r>
+              <a:rPr lang="en-US" sz="1050" dirty="0">
+                <a:solidFill>
+                  <a:srgbClr val="13315C"/>
+                </a:solidFill>
+                <a:latin typeface="Malgun Gothic" pitchFamily="34" charset="0"/>
+                <a:ea typeface="Malgun Gothic" pitchFamily="34" charset="-122"/>
+                <a:cs typeface="Malgun Gothic" pitchFamily="34" charset="-120"/>
+              </a:rPr>
+              <a:t>값은 물리량(float) 그대로라 지도를 클릭하면 hPa·m/s·m 단위 셀값이 표시됩니다.</a:t>
+            </a:r>
+            <a:endParaRPr lang="en-US" sz="1050" dirty="0"/>
+          </a:p>
+          <a:p>
+            <a:pPr marL="342900" indent="-342900">
+              <a:spcAft>
+                <a:spcPts val="900"/>
+              </a:spcAft>
+              <a:buSzPct val="100000"/>
+              <a:buChar char="•"/>
+            </a:pPr>
+            <a:r>
+              <a:rPr lang="en-US" sz="1050" dirty="0">
+                <a:solidFill>
+                  <a:srgbClr val="13315C"/>
+                </a:solidFill>
+                <a:latin typeface="Malgun Gothic" pitchFamily="34" charset="0"/>
+                <a:ea typeface="Malgun Gothic" pitchFamily="34" charset="-122"/>
+                <a:cs typeface="Malgun Gothic" pitchFamily="34" charset="-120"/>
+              </a:rPr>
+              <a:t>해빙 예측·항적과 겹쳐 항로 주변 바람·파랑 여건을 함께 확인하세요.</a:t>
+            </a:r>
+            <a:endParaRPr lang="en-US" sz="1050" dirty="0"/>
+          </a:p>
+        </p:txBody>
+      </p:sp>
+    </p:spTree>
+  </p:cSld>
+  <p:clrMapOvr>
+    <a:masterClrMapping/>
+  </p:clrMapOvr>
+</p:sld>
+</file>
+
+<file path=ppt/slides/slide11.xml><?xml version="1.0" encoding="utf-8"?>
 <p:sld xmlns:a="http://schemas.openxmlformats.org/drawingml/2006/main" xmlns:r="http://schemas.openxmlformats.org/officeDocument/2006/relationships" xmlns:p="http://schemas.openxmlformats.org/presentationml/2006/main">
   <p:cSld name="Slide 11">
     <p:bg>
@@ -2138,7 +2640,7 @@
         <p:spPr>
           <a:xfrm>
             <a:off x="548640" y="1417320"/>
-            <a:ext cx="6583680" cy="457200"/>
+            <a:ext cx="6583680" cy="392912"/>
           </a:xfrm>
           <a:prstGeom prst="rect">
             <a:avLst/>
@@ -2647,7 +3149,7 @@
 </p:sld>
 </file>
 
-<file path=ppt/slides/slide11.xml><?xml version="1.0" encoding="utf-8"?>
+<file path=ppt/slides/slide12.xml><?xml version="1.0" encoding="utf-8"?>
 <p:sld xmlns:a="http://schemas.openxmlformats.org/drawingml/2006/main" xmlns:r="http://schemas.openxmlformats.org/officeDocument/2006/relationships" xmlns:p="http://schemas.openxmlformats.org/presentationml/2006/main">
   <p:cSld name="Slide 12">
     <p:bg>
@@ -3532,509 +4034,6 @@
               <a:t>※ 예상 위치는 직선(대권) 항로·일정 속력을 가정한 참고값입니다. 해빙·기상·항로 우회는 반영되지 않습니다.</a:t>
             </a:r>
             <a:endParaRPr lang="en-US" sz="1100" dirty="0"/>
-          </a:p>
-        </p:txBody>
-      </p:sp>
-    </p:spTree>
-  </p:cSld>
-  <p:clrMapOvr>
-    <a:masterClrMapping/>
-  </p:clrMapOvr>
-</p:sld>
-</file>
-
-<file path=ppt/slides/slide12.xml><?xml version="1.0" encoding="utf-8"?>
-<p:sld xmlns:a="http://schemas.openxmlformats.org/drawingml/2006/main" xmlns:r="http://schemas.openxmlformats.org/officeDocument/2006/relationships" xmlns:p="http://schemas.openxmlformats.org/presentationml/2006/main">
-  <p:cSld name="Slide 10">
-    <p:bg>
-      <p:bgPr>
-        <a:solidFill>
-          <a:srgbClr val="FFFFFF"/>
-        </a:solidFill>
-        <a:effectLst/>
-      </p:bgPr>
-    </p:bg>
-    <p:spTree>
-      <p:nvGrpSpPr>
-        <p:cNvPr id="1" name=""/>
-        <p:cNvGrpSpPr/>
-        <p:nvPr/>
-      </p:nvGrpSpPr>
-      <p:grpSpPr>
-        <a:xfrm>
-          <a:off x="0" y="0"/>
-          <a:ext cx="0" cy="0"/>
-          <a:chOff x="0" y="0"/>
-          <a:chExt cx="0" cy="0"/>
-        </a:xfrm>
-      </p:grpSpPr>
-      <p:sp>
-        <p:nvSpPr>
-          <p:cNvPr id="2" name="Text 0"/>
-          <p:cNvSpPr txBox="1"/>
-          <p:nvPr/>
-        </p:nvSpPr>
-        <p:spPr>
-          <a:xfrm>
-            <a:off x="11365992" y="6446520"/>
-            <a:ext cx="457200" cy="274320"/>
-          </a:xfrm>
-          <a:prstGeom prst="rect">
-            <a:avLst/>
-          </a:prstGeom>
-          <a:noFill/>
-          <a:ln/>
-        </p:spPr>
-        <p:txBody>
-          <a:bodyPr wrap="square" lIns="0" tIns="0" rIns="0" bIns="0" rtlCol="0" anchor="ctr"/>
-          <a:lstStyle/>
-          <a:p>
-            <a:pPr marL="0" indent="0" algn="r">
-              <a:buNone/>
-            </a:pPr>
-            <a:r>
-              <a:rPr lang="en-US" sz="1000" dirty="0">
-                <a:solidFill>
-                  <a:srgbClr val="5B6B7B"/>
-                </a:solidFill>
-                <a:latin typeface="Malgun Gothic" pitchFamily="34" charset="0"/>
-                <a:ea typeface="Malgun Gothic" pitchFamily="34" charset="-122"/>
-                <a:cs typeface="Malgun Gothic" pitchFamily="34" charset="-120"/>
-              </a:rPr>
-              <a:t>10</a:t>
-            </a:r>
-            <a:endParaRPr lang="en-US" sz="1000" dirty="0"/>
-          </a:p>
-        </p:txBody>
-      </p:sp>
-      <p:sp>
-        <p:nvSpPr>
-          <p:cNvPr id="3" name="Text 1"/>
-          <p:cNvSpPr txBox="1"/>
-          <p:nvPr/>
-        </p:nvSpPr>
-        <p:spPr>
-          <a:xfrm>
-            <a:off x="548640" y="6446520"/>
-            <a:ext cx="5486400" cy="274320"/>
-          </a:xfrm>
-          <a:prstGeom prst="rect">
-            <a:avLst/>
-          </a:prstGeom>
-          <a:noFill/>
-          <a:ln/>
-        </p:spPr>
-        <p:txBody>
-          <a:bodyPr wrap="square" lIns="0" tIns="0" rIns="0" bIns="0" rtlCol="0" anchor="ctr"/>
-          <a:lstStyle/>
-          <a:p>
-            <a:pPr marL="0" indent="0">
-              <a:buNone/>
-            </a:pPr>
-            <a:r>
-              <a:rPr lang="en-US" sz="1000" dirty="0">
-                <a:solidFill>
-                  <a:srgbClr val="5B6B7B"/>
-                </a:solidFill>
-                <a:latin typeface="Malgun Gothic" pitchFamily="34" charset="0"/>
-                <a:ea typeface="Malgun Gothic" pitchFamily="34" charset="-122"/>
-                <a:cs typeface="Malgun Gothic" pitchFamily="34" charset="-120"/>
-              </a:rPr>
-              <a:t>북극 해빙 데이터 웹 뷰어 · 사용 방법</a:t>
-            </a:r>
-            <a:endParaRPr lang="en-US" sz="1000" dirty="0"/>
-          </a:p>
-        </p:txBody>
-      </p:sp>
-      <p:sp>
-        <p:nvSpPr>
-          <p:cNvPr id="4" name="Text 2"/>
-          <p:cNvSpPr txBox="1"/>
-          <p:nvPr/>
-        </p:nvSpPr>
-        <p:spPr>
-          <a:xfrm>
-            <a:off x="548640" y="320040"/>
-            <a:ext cx="11064240" cy="685800"/>
-          </a:xfrm>
-          <a:prstGeom prst="rect">
-            <a:avLst/>
-          </a:prstGeom>
-          <a:noFill/>
-          <a:ln/>
-        </p:spPr>
-        <p:txBody>
-          <a:bodyPr wrap="square" lIns="0" tIns="0" rIns="0" bIns="0" rtlCol="0" anchor="ctr"/>
-          <a:lstStyle/>
-          <a:p>
-            <a:pPr marL="0" indent="0">
-              <a:buNone/>
-            </a:pPr>
-            <a:r>
-              <a:rPr lang="en-US" sz="3000" b="1" dirty="0">
-                <a:solidFill>
-                  <a:srgbClr val="0B2545"/>
-                </a:solidFill>
-                <a:latin typeface="Malgun Gothic" pitchFamily="34" charset="0"/>
-                <a:ea typeface="Malgun Gothic" pitchFamily="34" charset="-122"/>
-                <a:cs typeface="Malgun Gothic" pitchFamily="34" charset="-120"/>
-              </a:rPr>
-              <a:t>기상 데이터 — GFS 바람·기압, WW3 파랑</a:t>
-            </a:r>
-            <a:endParaRPr lang="en-US" sz="3000" dirty="0"/>
-          </a:p>
-        </p:txBody>
-      </p:sp>
-      <p:sp>
-        <p:nvSpPr>
-          <p:cNvPr id="5" name="Text 3"/>
-          <p:cNvSpPr txBox="1"/>
-          <p:nvPr/>
-        </p:nvSpPr>
-        <p:spPr>
-          <a:xfrm>
-            <a:off x="548640" y="960120"/>
-            <a:ext cx="11064240" cy="365760"/>
-          </a:xfrm>
-          <a:prstGeom prst="rect">
-            <a:avLst/>
-          </a:prstGeom>
-          <a:noFill/>
-          <a:ln/>
-        </p:spPr>
-        <p:txBody>
-          <a:bodyPr wrap="square" lIns="0" tIns="0" rIns="0" bIns="0" rtlCol="0" anchor="ctr"/>
-          <a:lstStyle/>
-          <a:p>
-            <a:pPr marL="0" indent="0">
-              <a:buNone/>
-            </a:pPr>
-            <a:r>
-              <a:rPr lang="en-US" sz="1400" dirty="0">
-                <a:solidFill>
-                  <a:srgbClr val="5B6B7B"/>
-                </a:solidFill>
-                <a:latin typeface="Malgun Gothic" pitchFamily="34" charset="0"/>
-                <a:ea typeface="Malgun Gothic" pitchFamily="34" charset="-122"/>
-                <a:cs typeface="Malgun Gothic" pitchFamily="34" charset="-120"/>
-              </a:rPr>
-              <a:t>기상 탭 → GFS(0.25도) · WW3(9 km) — 예보 시계열을 재생 막대로 넘겨 봅니다</a:t>
-            </a:r>
-            <a:endParaRPr lang="en-US" sz="1400" dirty="0"/>
-          </a:p>
-        </p:txBody>
-      </p:sp>
-      <p:sp>
-        <p:nvSpPr>
-          <p:cNvPr id="6" name="Shape 4"/>
-          <p:cNvSpPr/>
-          <p:nvPr/>
-        </p:nvSpPr>
-        <p:spPr>
-          <a:xfrm>
-            <a:off x="493776" y="1362456"/>
-            <a:ext cx="4681728" cy="4407408"/>
-          </a:xfrm>
-          <a:prstGeom prst="roundRect">
-            <a:avLst>
-              <a:gd name="adj" fmla="val 1660"/>
-            </a:avLst>
-          </a:prstGeom>
-          <a:solidFill>
-            <a:srgbClr val="FFFFFF"/>
-          </a:solidFill>
-          <a:ln w="9525">
-            <a:solidFill>
-              <a:srgbClr val="C9D6E3"/>
-            </a:solidFill>
-            <a:prstDash val="solid"/>
-          </a:ln>
-          <a:effectLst>
-            <a:outerShdw blurRad="76200" dist="25400" dir="5400000" algn="bl" rotWithShape="0">
-              <a:srgbClr val="000000">
-                <a:alpha val="18000"/>
-              </a:srgbClr>
-            </a:outerShdw>
-          </a:effectLst>
-        </p:spPr>
-        <p:txBody>
-          <a:bodyPr/>
-          <a:lstStyle/>
-          <a:p>
-            <a:endParaRPr lang="ko-KR" altLang="en-US"/>
-          </a:p>
-        </p:txBody>
-      </p:sp>
-      <p:pic>
-        <p:nvPicPr>
-          <p:cNvPr id="7" name="Image 0" descr="/tmp/shots/10b_swaths_map.png"/>
-          <p:cNvPicPr>
-            <a:picLocks noChangeAspect="1"/>
-          </p:cNvPicPr>
-          <p:nvPr/>
-        </p:nvPicPr>
-        <p:blipFill>
-          <a:blip r:embed="rId3"/>
-          <a:stretch>
-            <a:fillRect/>
-          </a:stretch>
-        </p:blipFill>
-        <p:spPr>
-          <a:xfrm>
-            <a:off x="548640" y="1417320"/>
-            <a:ext cx="4572000" cy="4297680"/>
-          </a:xfrm>
-          <a:prstGeom prst="rect">
-            <a:avLst/>
-          </a:prstGeom>
-        </p:spPr>
-      </p:pic>
-      <p:sp>
-        <p:nvSpPr>
-          <p:cNvPr id="8" name="Text 5"/>
-          <p:cNvSpPr txBox="1"/>
-          <p:nvPr/>
-        </p:nvSpPr>
-        <p:spPr>
-          <a:xfrm>
-            <a:off x="548640" y="5806440"/>
-            <a:ext cx="4572000" cy="274320"/>
-          </a:xfrm>
-          <a:prstGeom prst="rect">
-            <a:avLst/>
-          </a:prstGeom>
-          <a:noFill/>
-          <a:ln/>
-        </p:spPr>
-        <p:txBody>
-          <a:bodyPr wrap="square" lIns="0" tIns="0" rIns="0" bIns="0" rtlCol="0" anchor="ctr"/>
-          <a:lstStyle/>
-          <a:p>
-            <a:pPr marL="0" indent="0">
-              <a:buNone/>
-            </a:pPr>
-            <a:r>
-              <a:rPr lang="en-US" sz="1050" i="1" dirty="0">
-                <a:solidFill>
-                  <a:srgbClr val="5B6B7B"/>
-                </a:solidFill>
-                <a:latin typeface="Malgun Gothic" pitchFamily="34" charset="0"/>
-                <a:ea typeface="Malgun Gothic" pitchFamily="34" charset="-122"/>
-                <a:cs typeface="Malgun Gothic" pitchFamily="34" charset="-120"/>
-              </a:rPr>
-              <a:t>GFS 해면기압(hPa) — 기상 탭에서 담아 그린 모습 (저기압 = 푸른색)</a:t>
-            </a:r>
-            <a:endParaRPr lang="en-US" sz="1050" dirty="0"/>
-          </a:p>
-        </p:txBody>
-      </p:sp>
-      <p:sp>
-        <p:nvSpPr>
-          <p:cNvPr id="9" name="Shape 6"/>
-          <p:cNvSpPr/>
-          <p:nvPr/>
-        </p:nvSpPr>
-        <p:spPr>
-          <a:xfrm>
-            <a:off x="5294376" y="1362456"/>
-            <a:ext cx="4681728" cy="4407408"/>
-          </a:xfrm>
-          <a:prstGeom prst="roundRect">
-            <a:avLst>
-              <a:gd name="adj" fmla="val 1660"/>
-            </a:avLst>
-          </a:prstGeom>
-          <a:solidFill>
-            <a:srgbClr val="FFFFFF"/>
-          </a:solidFill>
-          <a:ln w="9525">
-            <a:solidFill>
-              <a:srgbClr val="C9D6E3"/>
-            </a:solidFill>
-            <a:prstDash val="solid"/>
-          </a:ln>
-          <a:effectLst>
-            <a:outerShdw blurRad="76200" dist="25400" dir="5400000" algn="bl" rotWithShape="0">
-              <a:srgbClr val="000000">
-                <a:alpha val="18000"/>
-              </a:srgbClr>
-            </a:outerShdw>
-          </a:effectLst>
-        </p:spPr>
-        <p:txBody>
-          <a:bodyPr/>
-          <a:lstStyle/>
-          <a:p>
-            <a:endParaRPr lang="ko-KR" altLang="en-US"/>
-          </a:p>
-        </p:txBody>
-      </p:sp>
-      <p:pic>
-        <p:nvPicPr>
-          <p:cNvPr id="10" name="Image 1" descr="/tmp/shots/11b_asip_map.png"/>
-          <p:cNvPicPr>
-            <a:picLocks noChangeAspect="1"/>
-          </p:cNvPicPr>
-          <p:nvPr/>
-        </p:nvPicPr>
-        <p:blipFill>
-          <a:blip r:embed="rId4"/>
-          <a:stretch>
-            <a:fillRect/>
-          </a:stretch>
-        </p:blipFill>
-        <p:spPr>
-          <a:xfrm>
-            <a:off x="5349240" y="1417320"/>
-            <a:ext cx="4572000" cy="4297680"/>
-          </a:xfrm>
-          <a:prstGeom prst="rect">
-            <a:avLst/>
-          </a:prstGeom>
-        </p:spPr>
-      </p:pic>
-      <p:sp>
-        <p:nvSpPr>
-          <p:cNvPr id="11" name="Text 7"/>
-          <p:cNvSpPr txBox="1"/>
-          <p:nvPr/>
-        </p:nvSpPr>
-        <p:spPr>
-          <a:xfrm>
-            <a:off x="5349240" y="5806440"/>
-            <a:ext cx="4572000" cy="274320"/>
-          </a:xfrm>
-          <a:prstGeom prst="rect">
-            <a:avLst/>
-          </a:prstGeom>
-          <a:noFill/>
-          <a:ln/>
-        </p:spPr>
-        <p:txBody>
-          <a:bodyPr wrap="square" lIns="0" tIns="0" rIns="0" bIns="0" rtlCol="0" anchor="ctr"/>
-          <a:lstStyle/>
-          <a:p>
-            <a:pPr marL="0" indent="0">
-              <a:buNone/>
-            </a:pPr>
-            <a:r>
-              <a:rPr lang="en-US" sz="1050" i="1" dirty="0">
-                <a:solidFill>
-                  <a:srgbClr val="5B6B7B"/>
-                </a:solidFill>
-                <a:latin typeface="Malgun Gothic" pitchFamily="34" charset="0"/>
-                <a:ea typeface="Malgun Gothic" pitchFamily="34" charset="-122"/>
-                <a:cs typeface="Malgun Gothic" pitchFamily="34" charset="-120"/>
-              </a:rPr>
-              <a:t>WW3 1차 너울 파고(m) — 북극 9 km 파랑 예보</a:t>
-            </a:r>
-            <a:endParaRPr lang="en-US" sz="1050" dirty="0"/>
-          </a:p>
-        </p:txBody>
-      </p:sp>
-      <p:sp>
-        <p:nvSpPr>
-          <p:cNvPr id="12" name="Text 8"/>
-          <p:cNvSpPr txBox="1"/>
-          <p:nvPr/>
-        </p:nvSpPr>
-        <p:spPr>
-          <a:xfrm>
-            <a:off x="10104120" y="1463040"/>
-            <a:ext cx="1600200" cy="4572000"/>
-          </a:xfrm>
-          <a:prstGeom prst="rect">
-            <a:avLst/>
-          </a:prstGeom>
-          <a:noFill/>
-          <a:ln/>
-        </p:spPr>
-        <p:txBody>
-          <a:bodyPr wrap="square" lIns="0" tIns="0" rIns="0" bIns="0" rtlCol="0" anchor="t"/>
-          <a:lstStyle/>
-          <a:p>
-            <a:pPr marL="342900" indent="-342900">
-              <a:spcAft>
-                <a:spcPts val="900"/>
-              </a:spcAft>
-              <a:buSzPct val="100000"/>
-              <a:buChar char="•"/>
-            </a:pPr>
-            <a:r>
-              <a:rPr lang="en-US" sz="1050" dirty="0">
-                <a:solidFill>
-                  <a:srgbClr val="13315C"/>
-                </a:solidFill>
-                <a:latin typeface="Malgun Gothic" pitchFamily="34" charset="0"/>
-                <a:ea typeface="Malgun Gothic" pitchFamily="34" charset="-122"/>
-                <a:cs typeface="Malgun Gothic" pitchFamily="34" charset="-120"/>
-              </a:rPr>
-              <a:t>GFS: 10 m 풍속·해면기압·2 m 기온. 기준일 run 의 예보 리드가 시계열 1항목으로 묶입니다.</a:t>
-            </a:r>
-            <a:endParaRPr lang="en-US" sz="1050" dirty="0"/>
-          </a:p>
-          <a:p>
-            <a:pPr marL="342900" indent="-342900">
-              <a:spcAft>
-                <a:spcPts val="900"/>
-              </a:spcAft>
-              <a:buSzPct val="100000"/>
-              <a:buChar char="•"/>
-            </a:pPr>
-            <a:r>
-              <a:rPr lang="en-US" sz="1050" dirty="0">
-                <a:solidFill>
-                  <a:srgbClr val="13315C"/>
-                </a:solidFill>
-                <a:latin typeface="Malgun Gothic" pitchFamily="34" charset="0"/>
-                <a:ea typeface="Malgun Gothic" pitchFamily="34" charset="-122"/>
-                <a:cs typeface="Malgun Gothic" pitchFamily="34" charset="-120"/>
-              </a:rPr>
-              <a:t>WW3: 1차 너울 파고·전체 유의파고·파주기 (GFS-Wave 북극 9 km 격자).</a:t>
-            </a:r>
-            <a:endParaRPr lang="en-US" sz="1050" dirty="0"/>
-          </a:p>
-          <a:p>
-            <a:pPr marL="342900" indent="-342900">
-              <a:spcAft>
-                <a:spcPts val="900"/>
-              </a:spcAft>
-              <a:buSzPct val="100000"/>
-              <a:buChar char="•"/>
-            </a:pPr>
-            <a:r>
-              <a:rPr lang="en-US" sz="1050" dirty="0">
-                <a:solidFill>
-                  <a:srgbClr val="13315C"/>
-                </a:solidFill>
-                <a:latin typeface="Malgun Gothic" pitchFamily="34" charset="0"/>
-                <a:ea typeface="Malgun Gothic" pitchFamily="34" charset="-122"/>
-                <a:cs typeface="Malgun Gothic" pitchFamily="34" charset="-120"/>
-              </a:rPr>
-              <a:t>값은 물리량(float) 그대로라 지도를 클릭하면 hPa·m/s·m 단위 셀값이 표시됩니다.</a:t>
-            </a:r>
-            <a:endParaRPr lang="en-US" sz="1050" dirty="0"/>
-          </a:p>
-          <a:p>
-            <a:pPr marL="342900" indent="-342900">
-              <a:spcAft>
-                <a:spcPts val="900"/>
-              </a:spcAft>
-              <a:buSzPct val="100000"/>
-              <a:buChar char="•"/>
-            </a:pPr>
-            <a:r>
-              <a:rPr lang="en-US" sz="1050" dirty="0">
-                <a:solidFill>
-                  <a:srgbClr val="13315C"/>
-                </a:solidFill>
-                <a:latin typeface="Malgun Gothic" pitchFamily="34" charset="0"/>
-                <a:ea typeface="Malgun Gothic" pitchFamily="34" charset="-122"/>
-                <a:cs typeface="Malgun Gothic" pitchFamily="34" charset="-120"/>
-              </a:rPr>
-              <a:t>해빙 예측·항적과 겹쳐 항로 주변 바람·파랑 여건을 함께 확인하세요.</a:t>
-            </a:r>
-            <a:endParaRPr lang="en-US" sz="1050" dirty="0"/>
           </a:p>
         </p:txBody>
       </p:sp>
@@ -5498,7 +5497,7 @@
                 <a:ea typeface="Malgun Gothic" pitchFamily="34" charset="-122"/>
                 <a:cs typeface="Malgun Gothic" pitchFamily="34" charset="-120"/>
               </a:rPr>
-              <a:t>관측 15종 · 예측 모델 8종 · 기상 2종 (Data_Out_sample 구성 기준) — 예측·기상은 시계열로 담습니다</a:t>
+              <a:t>관측 22종 · 예측 모델 9종 · 기상 6항목 (Data_Out 전수 구성 기준) — 예측·기상은 시계열로 담습니다</a:t>
             </a:r>
             <a:endParaRPr lang="en-US" sz="1400" dirty="0"/>
           </a:p>
@@ -5846,7 +5845,7 @@
                           <a:ea typeface="Malgun Gothic" pitchFamily="34" charset="-122"/>
                           <a:cs typeface="Malgun Gothic" pitchFamily="34" charset="-120"/>
                         </a:rPr>
-                        <a:t>고해상 해빙(HSI): L2 스와스 + L3 10 km + A25R/A25 합성(L2+L3 백필, 시계열)</a:t>
+                        <a:t>고해상 해빙(HSI): L2 스와스 + L3 10 km + A25R/A25 합성(시계열) — TP3R·TP3A3 관측 입력</a:t>
                       </a:r>
                       <a:endParaRPr lang="en-US" sz="1050" dirty="0">
                         <a:latin typeface="Malgun Gothic" charset="0"/>
@@ -5989,7 +5988,7 @@
                           <a:ea typeface="Malgun Gothic" pitchFamily="34" charset="-122"/>
                           <a:cs typeface="Malgun Gothic" pitchFamily="34" charset="-120"/>
                         </a:rPr>
-                        <a:t>AMSR2 / AMSR3 SIM</a:t>
+                        <a:t>AMSR2 / AMSR3 SIC</a:t>
                       </a:r>
                       <a:endParaRPr lang="en-US" sz="1050" dirty="0">
                         <a:latin typeface="Malgun Gothic" charset="0"/>
@@ -6057,7 +6056,7 @@
                           <a:ea typeface="Malgun Gothic" pitchFamily="34" charset="-122"/>
                           <a:cs typeface="Malgun Gothic" pitchFamily="34" charset="-120"/>
                         </a:rPr>
-                        <a:t>해빙 이동 U·V·속력 (AMSR2 연구 25 km · AMSR3 10 km)</a:t>
+                        <a:t>해빙농도(SIC): AMSR2 L2 스와스 + L3 25 km + A25 합성(시계열, TP3A2 관측) · AMSR3 L2 스와스</a:t>
                       </a:r>
                       <a:endParaRPr lang="en-US" sz="1050" dirty="0">
                         <a:latin typeface="Malgun Gothic" charset="0"/>
@@ -6125,7 +6124,7 @@
                           <a:ea typeface="Malgun Gothic" pitchFamily="34" charset="-122"/>
                           <a:cs typeface="Malgun Gothic" pitchFamily="34" charset="-120"/>
                         </a:rPr>
-                        <a:t>하루 성분별 1항목</a:t>
+                        <a:t>패스·합성 1항목</a:t>
                       </a:r>
                       <a:endParaRPr lang="en-US" sz="1050" dirty="0">
                         <a:latin typeface="Malgun Gothic" charset="0"/>
@@ -6268,7 +6267,7 @@
                           <a:ea typeface="Malgun Gothic" pitchFamily="34" charset="-122"/>
                           <a:cs typeface="Malgun Gothic" pitchFamily="34" charset="-120"/>
                         </a:rPr>
-                        <a:t>ASIP L3/L4 해빙농도 0.5/1 km · VNP29 NRT 스와스 · VJ129P1D 일별 타일</a:t>
+                        <a:t>ASIP L3/L4 해빙농도 0.5/1 km · VIIRS NRT 3위성(VNP29·VJ129·VJ229) · 일별 타일(VJ129P1D·VJ229P1D)</a:t>
                       </a:r>
                       <a:endParaRPr lang="en-US" sz="1050" dirty="0">
                         <a:latin typeface="Malgun Gothic" charset="0"/>
@@ -7093,7 +7092,7 @@
                           <a:ea typeface="Malgun Gothic" pitchFamily="34" charset="-122"/>
                           <a:cs typeface="Malgun Gothic" pitchFamily="34" charset="-120"/>
                         </a:rPr>
-                        <a:t>②③ TP3A3 / TP3R</a:t>
+                        <a:t>②③ TP3A3 / TP3R / TP3A2</a:t>
                       </a:r>
                       <a:endParaRPr lang="en-US" sz="1050" dirty="0">
                         <a:latin typeface="Malgun Gothic" charset="0"/>
@@ -7161,7 +7160,7 @@
                           <a:ea typeface="Malgun Gothic" pitchFamily="34" charset="-122"/>
                           <a:cs typeface="Malgun Gothic" pitchFamily="34" charset="-120"/>
                         </a:rPr>
-                        <a:t>6.25 km · KIOST 편차보정 (TOPAZ5 + AMSR3 A25 / AMSR2 연구 A25R)</a:t>
+                        <a:t>6.25 km · KIOST 편차보정 (TOPAZ5 + AMSR3 A25 / AMSR2 연구 A25R / AMSR2 표준 A25)</a:t>
                       </a:r>
                       <a:endParaRPr lang="en-US" sz="1050" dirty="0">
                         <a:latin typeface="Malgun Gothic" charset="0"/>
@@ -8378,7 +8377,7 @@
                 <a:ea typeface="Malgun Gothic" pitchFamily="34" charset="-122"/>
                 <a:cs typeface="Malgun Gothic" pitchFamily="34" charset="-120"/>
               </a:rPr>
-              <a:t>※ 기상 2종 — GFS(10 m 풍속·해면기압·기온, 0.25도)·WW3(파고·파주기, 북극 9 km)은 "기상" 섹션에 시계열로 표시됩니다. MET-AICE 는 기본 제외(--models met_aice 로 처리). 모두 EPSG:3413 격자라 바로 겹쳐 비교할 수 있습니다.</a:t>
+              <a:t>※ 기상 6항목 — GFS(10 m 풍속·해면기압·기온, 0.25도)·WW3(너울·유의파고·파주기, 북극 9 km)은 "기상" 섹션에 시계열로 표시됩니다. AMSR SIM 은 Data_Out 산출 중단으로, MET-AICE 는 기본 제외. 모두 EPSG:3413 격자라 바로 겹쳐 비교할 수 있습니다.</a:t>
             </a:r>
             <a:endParaRPr lang="en-US" sz="1100" dirty="0"/>
           </a:p>
@@ -10311,7 +10310,7 @@
         <p:spPr>
           <a:xfrm>
             <a:off x="548640" y="1417320"/>
-            <a:ext cx="7863840" cy="777240"/>
+            <a:ext cx="7863840" cy="462234"/>
           </a:xfrm>
           <a:prstGeom prst="rect">
             <a:avLst/>
@@ -11259,7 +11258,7 @@
                 <a:ea typeface="Malgun Gothic" pitchFamily="34" charset="-122"/>
                 <a:cs typeface="Malgun Gothic" pitchFamily="34" charset="-120"/>
               </a:rPr>
-              <a:t>일평균(TOPAZ5), 6시간 리드(RIOPS), D+n(MET-AICE) 처럼 축이 달라도 같은 시각에서 비교할 수 있습니다.</a:t>
+              <a:t>일평균(TOPAZ5·TP3 계열), 6시간 리드(RIOPS), 12시간 리드(GIOPS) 처럼 축이 달라도 같은 시각에서 비교할 수 있습니다.</a:t>
             </a:r>
             <a:endParaRPr lang="en-US" sz="1100" dirty="0"/>
           </a:p>
@@ -11296,7 +11295,7 @@
                 <a:ea typeface="Malgun Gothic" pitchFamily="34" charset="-122"/>
                 <a:cs typeface="Malgun Gothic" pitchFamily="34" charset="-120"/>
               </a:rPr>
-              <a:t>막대 아래 줄 = 레이어별 현재 프레임 라벨 (예: TOPAZ5 08-30 · MET-AICE D+1).</a:t>
+              <a:t>막대 아래 줄 = 레이어별 현재 프레임 라벨 (예: TP3R 10-03 · TOPAZ5 10-03).</a:t>
             </a:r>
             <a:endParaRPr lang="en-US" sz="1100" dirty="0"/>
           </a:p>
@@ -11337,7 +11336,7 @@
                 <a:ea typeface="Malgun Gothic" pitchFamily="34" charset="-122"/>
                 <a:cs typeface="Malgun Gothic" pitchFamily="34" charset="-120"/>
               </a:rPr>
-              <a:t>예) TOPAZ5 해빙농도 10일 + MET-AICE SIC 7일을 함께 담고 ▶ 재생 → 두 모델의 빙연 변화를 같은 날짜에서 비교</a:t>
+              <a:t>예) TOPAZ5 해빙농도 10일 + TP3R 보정 해빙농도 10일을 함께 담고 ▶ 재생 → 원모델과 보정 예측의 빙연 변화를 같은 날짜에서 비교</a:t>
             </a:r>
             <a:endParaRPr lang="en-US" sz="1200" dirty="0"/>
           </a:p>
@@ -11526,7 +11525,7 @@
                 <a:ea typeface="Malgun Gothic" pitchFamily="34" charset="-122"/>
                 <a:cs typeface="Malgun Gothic" pitchFamily="34" charset="-120"/>
               </a:rPr>
-              <a:t>관측 탭 → 제품 제목 펼치기 → 패스별 ＋ 또는 ＋전체 (HSI·SIM·SAR·광학·IST·VIIRS)</a:t>
+              <a:t>관측 탭 → 제품 제목 펼치기 → 패스별 ＋ 또는 ＋전체 (SIC·HSI·SAR·광학·IST·VIIRS)</a:t>
             </a:r>
             <a:endParaRPr lang="en-US" sz="1400" dirty="0"/>
           </a:p>
@@ -11630,7 +11629,7 @@
                 <a:ea typeface="Malgun Gothic" pitchFamily="34" charset="-122"/>
                 <a:cs typeface="Malgun Gothic" pitchFamily="34" charset="-120"/>
               </a:rPr>
-              <a:t>스와스 제품 하루치를 ＋전체로 한꺼번에 그린 모습 (그림은 AMSR2 L2 예시)</a:t>
+              <a:t>스와스 제품 하루치를 ＋전체로 한꺼번에 그린 모습 (그림은 AMSR3 L2 HSI 예시)</a:t>
             </a:r>
             <a:endParaRPr lang="en-US" sz="1050" dirty="0"/>
           </a:p>
@@ -11734,7 +11733,7 @@
                 <a:ea typeface="Malgun Gothic" pitchFamily="34" charset="-122"/>
                 <a:cs typeface="Malgun Gothic" pitchFamily="34" charset="-120"/>
               </a:rPr>
-              <a:t>ASIP L4 1 km + AMSR L3 10 km 일별 격자</a:t>
+              <a:t>ASIP L4 1 km + AMSR3 L3 HSI 10 km 일별 격자</a:t>
             </a:r>
             <a:endParaRPr lang="en-US" sz="1050" dirty="0"/>
           </a:p>
@@ -11819,7 +11818,7 @@
                 <a:ea typeface="Malgun Gothic" pitchFamily="34" charset="-122"/>
                 <a:cs typeface="Malgun Gothic" pitchFamily="34" charset="-120"/>
               </a:rPr>
-              <a:t>L3(HSI 10 km·SIM)·ASIP·VJ129P1D 는 하루 격자. 모델 위에 올려 빙연을 대조하세요.</a:t>
+              <a:t>L3(SIC 25 km·HSI 10 km)·ASIP·P1D 타일은 하루 격자. 모델 위에 올려 빙연을 대조하세요.</a:t>
             </a:r>
             <a:endParaRPr lang="en-US" sz="1050" dirty="0"/>
           </a:p>
@@ -11840,7 +11839,7 @@
                 <a:ea typeface="Malgun Gothic" pitchFamily="34" charset="-122"/>
                 <a:cs typeface="Malgun Gothic" pitchFamily="34" charset="-120"/>
               </a:rPr>
-              <a:t>A25R/A25 HSI 합성은 시계열 1항목이라 재생 막대로 넘겨 봅니다. S2 트루컬러는 축소 RGB 로 표시됩니다.</a:t>
+              <a:t>A25 SIC·A25R/A25 HSI 합성은 시계열 1항목이라 재생 막대로 넘겨 봅니다. S2 트루컬러는 축소 RGB 로 표시됩니다.</a:t>
             </a:r>
             <a:endParaRPr lang="en-US" sz="1050" dirty="0"/>
           </a:p>
